--- a/data-eng/decks/w5d2s3.pptx
+++ b/data-eng/decks/w5d2s3.pptx
@@ -3100,7 +3100,7 @@
       <p:grpSpPr/>
       <p:sp>
         <p:nvSpPr>
-          <p:cNvPr id="2" name="Oval 1"/>
+          <p:cNvPr id="2" name="deckgen:decor"/>
           <p:cNvSpPr/>
           <p:nvPr/>
         </p:nvSpPr>
@@ -3130,7 +3130,7 @@
       </p:sp>
       <p:sp>
         <p:nvSpPr>
-          <p:cNvPr id="3" name="Oval 2"/>
+          <p:cNvPr id="3" name="deckgen:decor"/>
           <p:cNvSpPr/>
           <p:nvPr/>
         </p:nvSpPr>
@@ -3160,7 +3160,7 @@
       </p:sp>
       <p:sp>
         <p:nvSpPr>
-          <p:cNvPr id="4" name="Oval 3"/>
+          <p:cNvPr id="4" name="deckgen:decor"/>
           <p:cNvSpPr/>
           <p:nvPr/>
         </p:nvSpPr>
@@ -3190,7 +3190,7 @@
       </p:sp>
       <p:sp>
         <p:nvSpPr>
-          <p:cNvPr id="5" name="Rectangle 4"/>
+          <p:cNvPr id="5" name="deckgen:decor"/>
           <p:cNvSpPr/>
           <p:nvPr/>
         </p:nvSpPr>
@@ -3220,7 +3220,7 @@
       </p:sp>
       <p:sp>
         <p:nvSpPr>
-          <p:cNvPr id="6" name="Oval 5"/>
+          <p:cNvPr id="6" name="deckgen:decor"/>
           <p:cNvSpPr/>
           <p:nvPr/>
         </p:nvSpPr>
@@ -3250,7 +3250,7 @@
       </p:sp>
       <p:sp>
         <p:nvSpPr>
-          <p:cNvPr id="7" name="Oval 6"/>
+          <p:cNvPr id="7" name="deckgen:decor"/>
           <p:cNvSpPr/>
           <p:nvPr/>
         </p:nvSpPr>
@@ -3280,7 +3280,7 @@
       </p:sp>
       <p:sp>
         <p:nvSpPr>
-          <p:cNvPr id="8" name="Oval 7"/>
+          <p:cNvPr id="8" name="deckgen:decor"/>
           <p:cNvSpPr/>
           <p:nvPr/>
         </p:nvSpPr>
@@ -3310,7 +3310,7 @@
       </p:sp>
       <p:sp>
         <p:nvSpPr>
-          <p:cNvPr id="9" name="Oval 8"/>
+          <p:cNvPr id="9" name="deckgen:decor"/>
           <p:cNvSpPr/>
           <p:nvPr/>
         </p:nvSpPr>
@@ -3340,7 +3340,7 @@
       </p:sp>
       <p:sp>
         <p:nvSpPr>
-          <p:cNvPr id="10" name="Rectangle 9"/>
+          <p:cNvPr id="10" name="deckgen:decor"/>
           <p:cNvSpPr/>
           <p:nvPr/>
         </p:nvSpPr>
@@ -3618,7 +3618,7 @@
       <p:grpSpPr/>
       <p:sp>
         <p:nvSpPr>
-          <p:cNvPr id="2" name="Oval 1"/>
+          <p:cNvPr id="2" name="deckgen:decor"/>
           <p:cNvSpPr/>
           <p:nvPr/>
         </p:nvSpPr>
@@ -3648,7 +3648,7 @@
       </p:sp>
       <p:sp>
         <p:nvSpPr>
-          <p:cNvPr id="3" name="Oval 2"/>
+          <p:cNvPr id="3" name="deckgen:decor"/>
           <p:cNvSpPr/>
           <p:nvPr/>
         </p:nvSpPr>
@@ -3678,7 +3678,7 @@
       </p:sp>
       <p:sp>
         <p:nvSpPr>
-          <p:cNvPr id="4" name="Oval 3"/>
+          <p:cNvPr id="4" name="deckgen:decor"/>
           <p:cNvSpPr/>
           <p:nvPr/>
         </p:nvSpPr>
@@ -3959,7 +3959,7 @@
                 <a:ea typeface="Pretendard"/>
                 <a:cs typeface="Pretendard"/>
               </a:rPr>
-              <a:t>pi.py 로그 끝에 Pi is roughly 3.14… 가 찍힌다</a:t>
+              <a:t>pi.py 로그 끝에 Pi is roughly 3.14… · UI 에 Cores 4</a:t>
             </a:r>
           </a:p>
         </p:txBody>
@@ -4105,7 +4105,7 @@
                 <a:ea typeface="Pretendard"/>
                 <a:cs typeface="Pretendard"/>
               </a:rPr>
-              <a:t>first_job.py 로그에 count = 500000 이 찍힌다</a:t>
+              <a:t>결과 세 줄 count = 500000 · master spark:// · executors 3</a:t>
             </a:r>
           </a:p>
         </p:txBody>
@@ -4251,7 +4251,7 @@
                 <a:ea typeface="Pretendard"/>
                 <a:cs typeface="Pretendard"/>
               </a:rPr>
-              <a:t>master 가 spark://spark-master:7077 로 나온다</a:t>
+              <a:t>Completed 의 first-cluster-job 두 줄 Cores 4 와 2</a:t>
             </a:r>
           </a:p>
         </p:txBody>
@@ -4397,7 +4397,7 @@
                 <a:ea typeface="Pretendard"/>
                 <a:cs typeface="Pretendard"/>
               </a:rPr>
-              <a:t>Completed Applications 에서 제한 건 쪽 Cores 가 적다</a:t>
+              <a:t>8g 요구는 경고 15초 간격 두 줄 · UI 에 WAITING · Cores 0</a:t>
             </a:r>
           </a:p>
         </p:txBody>
@@ -4543,7 +4543,7 @@
                 <a:ea typeface="Pretendard"/>
                 <a:cs typeface="Pretendard"/>
               </a:rPr>
-              <a:t>8g 요구는 not accepted any resources 반복 · UI 에 WAITING</a:t>
+              <a:t>40초 뒤 timeout 으로 끊기고 Completed 로 옮겨 간다</a:t>
             </a:r>
           </a:p>
         </p:txBody>
@@ -4689,7 +4689,7 @@
                 <a:ea typeface="Pretendard"/>
                 <a:cs typeface="Pretendard"/>
               </a:rPr>
-              <a:t>exec -d 두 개가 동시에 RUNNING 으로 보인다</a:t>
+              <a:t>exec -d 두 개가 동시에 RUNNING · Cores 2</a:t>
             </a:r>
           </a:p>
         </p:txBody>
@@ -4826,7 +4826,7 @@
       <p:grpSpPr/>
       <p:sp>
         <p:nvSpPr>
-          <p:cNvPr id="2" name="Oval 1"/>
+          <p:cNvPr id="2" name="deckgen:decor"/>
           <p:cNvSpPr/>
           <p:nvPr/>
         </p:nvSpPr>
@@ -4856,7 +4856,7 @@
       </p:sp>
       <p:sp>
         <p:nvSpPr>
-          <p:cNvPr id="3" name="Oval 2"/>
+          <p:cNvPr id="3" name="deckgen:decor"/>
           <p:cNvSpPr/>
           <p:nvPr/>
         </p:nvSpPr>
@@ -5496,7 +5496,7 @@
                 <a:ea typeface="Pretendard"/>
                 <a:cs typeface="Pretendard"/>
               </a:rPr>
-              <a:t>5-3 준비 — 마스터 UI 200 · MinIO 컨테이너</a:t>
+              <a:t>5-3 준비 — 셋 Up · 마스터 UI 200</a:t>
             </a:r>
           </a:p>
         </p:txBody>
@@ -5633,7 +5633,7 @@
       <p:grpSpPr/>
       <p:sp>
         <p:nvSpPr>
-          <p:cNvPr id="2" name="Oval 1"/>
+          <p:cNvPr id="2" name="deckgen:decor"/>
           <p:cNvSpPr/>
           <p:nvPr/>
         </p:nvSpPr>
@@ -5663,7 +5663,7 @@
       </p:sp>
       <p:sp>
         <p:nvSpPr>
-          <p:cNvPr id="3" name="Oval 2"/>
+          <p:cNvPr id="3" name="deckgen:decor"/>
           <p:cNvSpPr/>
           <p:nvPr/>
         </p:nvSpPr>
@@ -5693,7 +5693,7 @@
       </p:sp>
       <p:sp>
         <p:nvSpPr>
-          <p:cNvPr id="4" name="Oval 3"/>
+          <p:cNvPr id="4" name="deckgen:decor"/>
           <p:cNvSpPr/>
           <p:nvPr/>
         </p:nvSpPr>
@@ -5974,7 +5974,7 @@
                 <a:ea typeface="Pretendard"/>
                 <a:cs typeface="Pretendard"/>
               </a:rPr>
-              <a:t>마스터 컨테이너의 spark-submit 으로 pi.py 예제를 제출한다</a:t>
+              <a:t>마스터 컨테이너의 spark-submit 으로 pi.py 예제 제출</a:t>
             </a:r>
           </a:p>
         </p:txBody>
@@ -6120,7 +6120,7 @@
                 <a:ea typeface="Pretendard"/>
                 <a:cs typeface="Pretendard"/>
               </a:rPr>
-              <a:t>first_job.py 를 넣고 제출해 master 값이 spark:// 임을 본다</a:t>
+              <a:t>first_job.py 를 만들어 넣고 master 가 spark:// 인지 확인</a:t>
             </a:r>
           </a:p>
         </p:txBody>
@@ -6266,7 +6266,7 @@
                 <a:ea typeface="Pretendard"/>
                 <a:cs typeface="Pretendard"/>
               </a:rPr>
-              <a:t>--total-executor-cores 로 제한하고 UI 의 Cores 를 비교한다</a:t>
+              <a:t>--total-executor-cores 2 로 제한해 UI 의 Cores 4 · 2 비교</a:t>
             </a:r>
           </a:p>
         </p:txBody>
@@ -6412,7 +6412,7 @@
                 <a:ea typeface="Pretendard"/>
                 <a:cs typeface="Pretendard"/>
               </a:rPr>
-              <a:t>자원을 과하게 요구해 WAITING 을 만들고, 두 잡을 동시에 돌린다</a:t>
+              <a:t>8g 를 요구해 WAITING 을 만들고, 두 잡을 동시에 돌리기</a:t>
             </a:r>
           </a:p>
         </p:txBody>
@@ -6624,7 +6624,7 @@
       <p:grpSpPr/>
       <p:sp>
         <p:nvSpPr>
-          <p:cNvPr id="2" name="Oval 1"/>
+          <p:cNvPr id="2" name="deckgen:decor"/>
           <p:cNvSpPr/>
           <p:nvPr/>
         </p:nvSpPr>
@@ -6654,7 +6654,7 @@
       </p:sp>
       <p:sp>
         <p:nvSpPr>
-          <p:cNvPr id="3" name="Oval 2"/>
+          <p:cNvPr id="3" name="deckgen:decor"/>
           <p:cNvSpPr/>
           <p:nvPr/>
         </p:nvSpPr>
@@ -6684,7 +6684,7 @@
       </p:sp>
       <p:sp>
         <p:nvSpPr>
-          <p:cNvPr id="4" name="Oval 3"/>
+          <p:cNvPr id="4" name="deckgen:decor"/>
           <p:cNvSpPr/>
           <p:nvPr/>
         </p:nvSpPr>
@@ -6860,7 +6860,7 @@
                 <a:ea typeface="Pretendard"/>
                 <a:cs typeface="Pretendard"/>
               </a:rPr>
-              <a:t>모든 제출은 docker compose exec spark-master /opt/spark/bin/spark-submit 으로 — 마스터 컨테이너 안에서</a:t>
+              <a:t>모든 제출은 마스터 컨테이너 안의 spark-submit 으로 — 6단계는 미니 과제</a:t>
             </a:r>
           </a:p>
         </p:txBody>
@@ -7170,7 +7170,7 @@
                 <a:ea typeface="Pretendard"/>
                 <a:cs typeface="Pretendard"/>
               </a:rPr>
-              <a:t>cp 로 넣고</a:t>
+              <a:t>히어독 · cp</a:t>
             </a:r>
           </a:p>
           <a:p>
@@ -7188,7 +7188,7 @@
                 <a:ea typeface="Pretendard"/>
                 <a:cs typeface="Pretendard"/>
               </a:rPr>
-              <a:t>제출</a:t>
+              <a:t>결과 세 줄</a:t>
             </a:r>
           </a:p>
         </p:txBody>
@@ -7352,7 +7352,7 @@
                 <a:ea typeface="Pretendard"/>
                 <a:cs typeface="Pretendard"/>
               </a:rPr>
-              <a:t>memory 1g</a:t>
+              <a:t>Cores 4 vs 2</a:t>
             </a:r>
           </a:p>
         </p:txBody>
@@ -7817,7 +7817,7 @@
       <p:grpSpPr/>
       <p:sp>
         <p:nvSpPr>
-          <p:cNvPr id="2" name="Oval 1"/>
+          <p:cNvPr id="2" name="deckgen:decor"/>
           <p:cNvSpPr/>
           <p:nvPr/>
         </p:nvSpPr>
@@ -7847,7 +7847,7 @@
       </p:sp>
       <p:sp>
         <p:nvSpPr>
-          <p:cNvPr id="3" name="Oval 2"/>
+          <p:cNvPr id="3" name="deckgen:decor"/>
           <p:cNvSpPr/>
           <p:nvPr/>
         </p:nvSpPr>
@@ -7877,7 +7877,7 @@
       </p:sp>
       <p:sp>
         <p:nvSpPr>
-          <p:cNvPr id="4" name="Oval 3"/>
+          <p:cNvPr id="4" name="deckgen:decor"/>
           <p:cNvSpPr/>
           <p:nvPr/>
         </p:nvSpPr>
@@ -8026,7 +8026,7 @@
         <p:spPr>
           <a:xfrm>
             <a:off x="1143000" y="2781300"/>
-            <a:ext cx="1383387" cy="571500"/>
+            <a:ext cx="1778508" cy="528638"/>
           </a:xfrm>
           <a:prstGeom prst="rect">
             <a:avLst/>
@@ -8056,7 +8056,7 @@
         <p:spPr>
           <a:xfrm>
             <a:off x="1143000" y="2781300"/>
-            <a:ext cx="1383387" cy="571500"/>
+            <a:ext cx="1778508" cy="528638"/>
           </a:xfrm>
           <a:prstGeom prst="rect">
             <a:avLst/>
@@ -8096,8 +8096,8 @@
         </p:nvSpPr>
         <p:spPr>
           <a:xfrm>
-            <a:off x="2526387" y="2781300"/>
-            <a:ext cx="14618613" cy="571500"/>
+            <a:off x="2921508" y="2781300"/>
+            <a:ext cx="14223492" cy="528638"/>
           </a:xfrm>
           <a:prstGeom prst="rect">
             <a:avLst/>
@@ -8128,8 +8128,8 @@
         </p:nvSpPr>
         <p:spPr>
           <a:xfrm>
-            <a:off x="2678787" y="2781300"/>
-            <a:ext cx="14313813" cy="571500"/>
+            <a:off x="3073908" y="2781300"/>
+            <a:ext cx="13918692" cy="528638"/>
           </a:xfrm>
           <a:prstGeom prst="rect">
             <a:avLst/>
@@ -8169,8 +8169,8 @@
         </p:nvSpPr>
         <p:spPr>
           <a:xfrm>
-            <a:off x="1143000" y="3429000"/>
-            <a:ext cx="1383387" cy="571500"/>
+            <a:off x="1143000" y="3386138"/>
+            <a:ext cx="1778508" cy="528638"/>
           </a:xfrm>
           <a:prstGeom prst="rect">
             <a:avLst/>
@@ -8199,8 +8199,8 @@
         </p:nvSpPr>
         <p:spPr>
           <a:xfrm>
-            <a:off x="1143000" y="3429000"/>
-            <a:ext cx="1383387" cy="571500"/>
+            <a:off x="1143000" y="3386138"/>
+            <a:ext cx="1778508" cy="528638"/>
           </a:xfrm>
           <a:prstGeom prst="rect">
             <a:avLst/>
@@ -8240,8 +8240,8 @@
         </p:nvSpPr>
         <p:spPr>
           <a:xfrm>
-            <a:off x="2526387" y="3429000"/>
-            <a:ext cx="14618613" cy="571500"/>
+            <a:off x="2921508" y="3386138"/>
+            <a:ext cx="14223492" cy="528638"/>
           </a:xfrm>
           <a:prstGeom prst="rect">
             <a:avLst/>
@@ -8272,8 +8272,8 @@
         </p:nvSpPr>
         <p:spPr>
           <a:xfrm>
-            <a:off x="2678787" y="3429000"/>
-            <a:ext cx="14313813" cy="571500"/>
+            <a:off x="3073908" y="3386138"/>
+            <a:ext cx="13918692" cy="528638"/>
           </a:xfrm>
           <a:prstGeom prst="rect">
             <a:avLst/>
@@ -8313,8 +8313,8 @@
         </p:nvSpPr>
         <p:spPr>
           <a:xfrm>
-            <a:off x="1143000" y="4076700"/>
-            <a:ext cx="1383387" cy="571500"/>
+            <a:off x="1143000" y="3990975"/>
+            <a:ext cx="1778508" cy="528638"/>
           </a:xfrm>
           <a:prstGeom prst="rect">
             <a:avLst/>
@@ -8343,8 +8343,8 @@
         </p:nvSpPr>
         <p:spPr>
           <a:xfrm>
-            <a:off x="1143000" y="4076700"/>
-            <a:ext cx="1383387" cy="571500"/>
+            <a:off x="1143000" y="3990975"/>
+            <a:ext cx="1778508" cy="528638"/>
           </a:xfrm>
           <a:prstGeom prst="rect">
             <a:avLst/>
@@ -8371,7 +8371,7 @@
                 <a:ea typeface="Pretendard"/>
                 <a:cs typeface="Pretendard"/>
               </a:rPr>
-              <a:t>파일 넣기</a:t>
+              <a:t>스크립트 만들기</a:t>
             </a:r>
           </a:p>
         </p:txBody>
@@ -8384,8 +8384,8 @@
         </p:nvSpPr>
         <p:spPr>
           <a:xfrm>
-            <a:off x="2526387" y="4076700"/>
-            <a:ext cx="14618613" cy="571500"/>
+            <a:off x="2921508" y="3990975"/>
+            <a:ext cx="14223492" cy="528638"/>
           </a:xfrm>
           <a:prstGeom prst="rect">
             <a:avLst/>
@@ -8416,8 +8416,8 @@
         </p:nvSpPr>
         <p:spPr>
           <a:xfrm>
-            <a:off x="2678787" y="4076700"/>
-            <a:ext cx="14313813" cy="571500"/>
+            <a:off x="3073908" y="3990975"/>
+            <a:ext cx="13918692" cy="528638"/>
           </a:xfrm>
           <a:prstGeom prst="rect">
             <a:avLst/>
@@ -8444,7 +8444,7 @@
                 <a:ea typeface="Pretendard"/>
                 <a:cs typeface="Pretendard"/>
               </a:rPr>
-              <a:t>docker compose cp first_job.py spark-master:/tmp/</a:t>
+              <a:t>cat &gt; first_job.py &lt;&lt; 'EOF' … EOF</a:t>
             </a:r>
           </a:p>
         </p:txBody>
@@ -8457,8 +8457,8 @@
         </p:nvSpPr>
         <p:spPr>
           <a:xfrm>
-            <a:off x="1143000" y="4724400"/>
-            <a:ext cx="1383387" cy="571500"/>
+            <a:off x="1143000" y="4595812"/>
+            <a:ext cx="1778508" cy="528638"/>
           </a:xfrm>
           <a:prstGeom prst="rect">
             <a:avLst/>
@@ -8487,8 +8487,8 @@
         </p:nvSpPr>
         <p:spPr>
           <a:xfrm>
-            <a:off x="1143000" y="4724400"/>
-            <a:ext cx="1383387" cy="571500"/>
+            <a:off x="1143000" y="4595812"/>
+            <a:ext cx="1778508" cy="528638"/>
           </a:xfrm>
           <a:prstGeom prst="rect">
             <a:avLst/>
@@ -8515,7 +8515,7 @@
                 <a:ea typeface="Pretendard"/>
                 <a:cs typeface="Pretendard"/>
               </a:rPr>
-              <a:t>내 스크립트</a:t>
+              <a:t>파일 넣기</a:t>
             </a:r>
           </a:p>
         </p:txBody>
@@ -8528,8 +8528,8 @@
         </p:nvSpPr>
         <p:spPr>
           <a:xfrm>
-            <a:off x="2526387" y="4724400"/>
-            <a:ext cx="14618613" cy="571500"/>
+            <a:off x="2921508" y="4595812"/>
+            <a:ext cx="14223492" cy="528638"/>
           </a:xfrm>
           <a:prstGeom prst="rect">
             <a:avLst/>
@@ -8560,8 +8560,8 @@
         </p:nvSpPr>
         <p:spPr>
           <a:xfrm>
-            <a:off x="2678787" y="4724400"/>
-            <a:ext cx="14313813" cy="571500"/>
+            <a:off x="3073908" y="4595812"/>
+            <a:ext cx="13918692" cy="528638"/>
           </a:xfrm>
           <a:prstGeom prst="rect">
             <a:avLst/>
@@ -8588,7 +8588,7 @@
                 <a:ea typeface="Pretendard"/>
                 <a:cs typeface="Pretendard"/>
               </a:rPr>
-              <a:t>/tmp/first_job.py</a:t>
+              <a:t>docker compose cp first_job.py spark-master:/tmp/first_job.py</a:t>
             </a:r>
           </a:p>
         </p:txBody>
@@ -8601,8 +8601,8 @@
         </p:nvSpPr>
         <p:spPr>
           <a:xfrm>
-            <a:off x="1143000" y="5372100"/>
-            <a:ext cx="1383387" cy="571500"/>
+            <a:off x="1143000" y="5200650"/>
+            <a:ext cx="1778508" cy="528638"/>
           </a:xfrm>
           <a:prstGeom prst="rect">
             <a:avLst/>
@@ -8631,8 +8631,8 @@
         </p:nvSpPr>
         <p:spPr>
           <a:xfrm>
-            <a:off x="1143000" y="5372100"/>
-            <a:ext cx="1383387" cy="571500"/>
+            <a:off x="1143000" y="5200650"/>
+            <a:ext cx="1778508" cy="528638"/>
           </a:xfrm>
           <a:prstGeom prst="rect">
             <a:avLst/>
@@ -8659,7 +8659,7 @@
                 <a:ea typeface="Pretendard"/>
                 <a:cs typeface="Pretendard"/>
               </a:rPr>
-              <a:t>자원 제한</a:t>
+              <a:t>결과 세 줄만</a:t>
             </a:r>
           </a:p>
         </p:txBody>
@@ -8672,8 +8672,8 @@
         </p:nvSpPr>
         <p:spPr>
           <a:xfrm>
-            <a:off x="2526387" y="5372100"/>
-            <a:ext cx="14618613" cy="571500"/>
+            <a:off x="2921508" y="5200650"/>
+            <a:ext cx="14223492" cy="528638"/>
           </a:xfrm>
           <a:prstGeom prst="rect">
             <a:avLst/>
@@ -8704,8 +8704,8 @@
         </p:nvSpPr>
         <p:spPr>
           <a:xfrm>
-            <a:off x="2678787" y="5372100"/>
-            <a:ext cx="14313813" cy="571500"/>
+            <a:off x="3073908" y="5200650"/>
+            <a:ext cx="13918692" cy="528638"/>
           </a:xfrm>
           <a:prstGeom prst="rect">
             <a:avLst/>
@@ -8732,7 +8732,7 @@
                 <a:ea typeface="Pretendard"/>
                 <a:cs typeface="Pretendard"/>
               </a:rPr>
-              <a:t>--total-executor-cores 2 --executor-memory 1g</a:t>
+              <a:t>2&gt;&amp;1 | grep -E "^(count|master|executors)"</a:t>
             </a:r>
           </a:p>
         </p:txBody>
@@ -8745,8 +8745,8 @@
         </p:nvSpPr>
         <p:spPr>
           <a:xfrm>
-            <a:off x="1143000" y="6019800"/>
-            <a:ext cx="1383387" cy="571500"/>
+            <a:off x="1143000" y="5805488"/>
+            <a:ext cx="1778508" cy="528638"/>
           </a:xfrm>
           <a:prstGeom prst="rect">
             <a:avLst/>
@@ -8775,8 +8775,8 @@
         </p:nvSpPr>
         <p:spPr>
           <a:xfrm>
-            <a:off x="1143000" y="6019800"/>
-            <a:ext cx="1383387" cy="571500"/>
+            <a:off x="1143000" y="5805488"/>
+            <a:ext cx="1778508" cy="528638"/>
           </a:xfrm>
           <a:prstGeom prst="rect">
             <a:avLst/>
@@ -8803,7 +8803,7 @@
                 <a:ea typeface="Pretendard"/>
                 <a:cs typeface="Pretendard"/>
               </a:rPr>
-              <a:t>동시 제출</a:t>
+              <a:t>자원 제한</a:t>
             </a:r>
           </a:p>
         </p:txBody>
@@ -8816,8 +8816,8 @@
         </p:nvSpPr>
         <p:spPr>
           <a:xfrm>
-            <a:off x="2526387" y="6019800"/>
-            <a:ext cx="14618613" cy="571500"/>
+            <a:off x="2921508" y="5805488"/>
+            <a:ext cx="14223492" cy="528638"/>
           </a:xfrm>
           <a:prstGeom prst="rect">
             <a:avLst/>
@@ -8848,8 +8848,8 @@
         </p:nvSpPr>
         <p:spPr>
           <a:xfrm>
-            <a:off x="2678787" y="6019800"/>
-            <a:ext cx="14313813" cy="571500"/>
+            <a:off x="3073908" y="5805488"/>
+            <a:ext cx="13918692" cy="528638"/>
           </a:xfrm>
           <a:prstGeom prst="rect">
             <a:avLst/>
@@ -8876,6 +8876,294 @@
                 <a:ea typeface="Pretendard"/>
                 <a:cs typeface="Pretendard"/>
               </a:rPr>
+              <a:t>--total-executor-cores 2 --executor-memory 1g</a:t>
+            </a:r>
+          </a:p>
+        </p:txBody>
+      </p:sp>
+      <p:sp>
+        <p:nvSpPr>
+          <p:cNvPr id="32" name="Rectangle 31"/>
+          <p:cNvSpPr/>
+          <p:nvPr/>
+        </p:nvSpPr>
+        <p:spPr>
+          <a:xfrm>
+            <a:off x="1143000" y="6410325"/>
+            <a:ext cx="1778508" cy="528638"/>
+          </a:xfrm>
+          <a:prstGeom prst="rect">
+            <a:avLst/>
+          </a:prstGeom>
+          <a:solidFill>
+            <a:srgbClr val="0D2B5E"/>
+          </a:solidFill>
+          <a:ln>
+            <a:noFill/>
+          </a:ln>
+          <a:effectLst/>
+        </p:spPr>
+        <p:txBody>
+          <a:bodyPr rtlCol="0" anchor="ctr" wrap="square"/>
+          <a:lstStyle/>
+          <a:p>
+            <a:pPr algn="ctr"/>
+          </a:p>
+        </p:txBody>
+      </p:sp>
+      <p:sp>
+        <p:nvSpPr>
+          <p:cNvPr id="33" name="TextBox 32"/>
+          <p:cNvSpPr txBox="1"/>
+          <p:nvPr/>
+        </p:nvSpPr>
+        <p:spPr>
+          <a:xfrm>
+            <a:off x="1143000" y="6410325"/>
+            <a:ext cx="1778508" cy="528638"/>
+          </a:xfrm>
+          <a:prstGeom prst="rect">
+            <a:avLst/>
+          </a:prstGeom>
+          <a:noFill/>
+        </p:spPr>
+        <p:txBody>
+          <a:bodyPr wrap="square" lIns="0" rIns="0" tIns="0" bIns="0" anchor="ctr">
+            <a:spAutoFit/>
+          </a:bodyPr>
+          <a:lstStyle/>
+          <a:p>
+            <a:pPr algn="ctr">
+              <a:lnSpc>
+                <a:spcPct val="100000"/>
+              </a:lnSpc>
+            </a:pPr>
+            <a:r>
+              <a:rPr sz="1800" b="1">
+                <a:solidFill>
+                  <a:srgbClr val="FFFFFF"/>
+                </a:solidFill>
+                <a:latin typeface="Pretendard"/>
+                <a:ea typeface="Pretendard"/>
+                <a:cs typeface="Pretendard"/>
+              </a:rPr>
+              <a:t>일부러 실패</a:t>
+            </a:r>
+          </a:p>
+        </p:txBody>
+      </p:sp>
+      <p:sp>
+        <p:nvSpPr>
+          <p:cNvPr id="34" name="Rectangle 33"/>
+          <p:cNvSpPr/>
+          <p:nvPr/>
+        </p:nvSpPr>
+        <p:spPr>
+          <a:xfrm>
+            <a:off x="2921508" y="6410325"/>
+            <a:ext cx="14223492" cy="528638"/>
+          </a:xfrm>
+          <a:prstGeom prst="rect">
+            <a:avLst/>
+          </a:prstGeom>
+          <a:solidFill>
+            <a:srgbClr val="FAFBFD"/>
+          </a:solidFill>
+          <a:ln w="9525">
+            <a:solidFill>
+              <a:srgbClr val="DCE1E8"/>
+            </a:solidFill>
+          </a:ln>
+          <a:effectLst/>
+        </p:spPr>
+        <p:txBody>
+          <a:bodyPr rtlCol="0" anchor="ctr" wrap="square"/>
+          <a:lstStyle/>
+          <a:p>
+            <a:pPr algn="ctr"/>
+          </a:p>
+        </p:txBody>
+      </p:sp>
+      <p:sp>
+        <p:nvSpPr>
+          <p:cNvPr id="35" name="TextBox 34"/>
+          <p:cNvSpPr txBox="1"/>
+          <p:nvPr/>
+        </p:nvSpPr>
+        <p:spPr>
+          <a:xfrm>
+            <a:off x="3073908" y="6410325"/>
+            <a:ext cx="13918692" cy="528638"/>
+          </a:xfrm>
+          <a:prstGeom prst="rect">
+            <a:avLst/>
+          </a:prstGeom>
+          <a:noFill/>
+        </p:spPr>
+        <p:txBody>
+          <a:bodyPr wrap="square" lIns="0" rIns="0" tIns="0" bIns="0" anchor="ctr">
+            <a:spAutoFit/>
+          </a:bodyPr>
+          <a:lstStyle/>
+          <a:p>
+            <a:pPr algn="l">
+              <a:lnSpc>
+                <a:spcPct val="115000"/>
+              </a:lnSpc>
+            </a:pPr>
+            <a:r>
+              <a:rPr sz="1800" b="0">
+                <a:solidFill>
+                  <a:srgbClr val="3D3D3D"/>
+                </a:solidFill>
+                <a:latin typeface="Pretendard"/>
+                <a:ea typeface="Pretendard"/>
+                <a:cs typeface="Pretendard"/>
+              </a:rPr>
+              <a:t>exec spark-master timeout 40 … --executor-memory 8g</a:t>
+            </a:r>
+          </a:p>
+        </p:txBody>
+      </p:sp>
+      <p:sp>
+        <p:nvSpPr>
+          <p:cNvPr id="36" name="Rectangle 35"/>
+          <p:cNvSpPr/>
+          <p:nvPr/>
+        </p:nvSpPr>
+        <p:spPr>
+          <a:xfrm>
+            <a:off x="1143000" y="7015162"/>
+            <a:ext cx="1778508" cy="528638"/>
+          </a:xfrm>
+          <a:prstGeom prst="rect">
+            <a:avLst/>
+          </a:prstGeom>
+          <a:solidFill>
+            <a:srgbClr val="0D2B5E"/>
+          </a:solidFill>
+          <a:ln>
+            <a:noFill/>
+          </a:ln>
+          <a:effectLst/>
+        </p:spPr>
+        <p:txBody>
+          <a:bodyPr rtlCol="0" anchor="ctr" wrap="square"/>
+          <a:lstStyle/>
+          <a:p>
+            <a:pPr algn="ctr"/>
+          </a:p>
+        </p:txBody>
+      </p:sp>
+      <p:sp>
+        <p:nvSpPr>
+          <p:cNvPr id="37" name="TextBox 36"/>
+          <p:cNvSpPr txBox="1"/>
+          <p:nvPr/>
+        </p:nvSpPr>
+        <p:spPr>
+          <a:xfrm>
+            <a:off x="1143000" y="7015162"/>
+            <a:ext cx="1778508" cy="528638"/>
+          </a:xfrm>
+          <a:prstGeom prst="rect">
+            <a:avLst/>
+          </a:prstGeom>
+          <a:noFill/>
+        </p:spPr>
+        <p:txBody>
+          <a:bodyPr wrap="square" lIns="0" rIns="0" tIns="0" bIns="0" anchor="ctr">
+            <a:spAutoFit/>
+          </a:bodyPr>
+          <a:lstStyle/>
+          <a:p>
+            <a:pPr algn="ctr">
+              <a:lnSpc>
+                <a:spcPct val="100000"/>
+              </a:lnSpc>
+            </a:pPr>
+            <a:r>
+              <a:rPr sz="1800" b="1">
+                <a:solidFill>
+                  <a:srgbClr val="FFFFFF"/>
+                </a:solidFill>
+                <a:latin typeface="Pretendard"/>
+                <a:ea typeface="Pretendard"/>
+                <a:cs typeface="Pretendard"/>
+              </a:rPr>
+              <a:t>동시 제출</a:t>
+            </a:r>
+          </a:p>
+        </p:txBody>
+      </p:sp>
+      <p:sp>
+        <p:nvSpPr>
+          <p:cNvPr id="38" name="Rectangle 37"/>
+          <p:cNvSpPr/>
+          <p:nvPr/>
+        </p:nvSpPr>
+        <p:spPr>
+          <a:xfrm>
+            <a:off x="2921508" y="7015162"/>
+            <a:ext cx="14223492" cy="528638"/>
+          </a:xfrm>
+          <a:prstGeom prst="rect">
+            <a:avLst/>
+          </a:prstGeom>
+          <a:solidFill>
+            <a:srgbClr val="FAFBFD"/>
+          </a:solidFill>
+          <a:ln w="9525">
+            <a:solidFill>
+              <a:srgbClr val="DCE1E8"/>
+            </a:solidFill>
+          </a:ln>
+          <a:effectLst/>
+        </p:spPr>
+        <p:txBody>
+          <a:bodyPr rtlCol="0" anchor="ctr" wrap="square"/>
+          <a:lstStyle/>
+          <a:p>
+            <a:pPr algn="ctr"/>
+          </a:p>
+        </p:txBody>
+      </p:sp>
+      <p:sp>
+        <p:nvSpPr>
+          <p:cNvPr id="39" name="TextBox 38"/>
+          <p:cNvSpPr txBox="1"/>
+          <p:nvPr/>
+        </p:nvSpPr>
+        <p:spPr>
+          <a:xfrm>
+            <a:off x="3073908" y="7015162"/>
+            <a:ext cx="13918692" cy="528638"/>
+          </a:xfrm>
+          <a:prstGeom prst="rect">
+            <a:avLst/>
+          </a:prstGeom>
+          <a:noFill/>
+        </p:spPr>
+        <p:txBody>
+          <a:bodyPr wrap="square" lIns="0" rIns="0" tIns="0" bIns="0" anchor="ctr">
+            <a:spAutoFit/>
+          </a:bodyPr>
+          <a:lstStyle/>
+          <a:p>
+            <a:pPr algn="l">
+              <a:lnSpc>
+                <a:spcPct val="115000"/>
+              </a:lnSpc>
+            </a:pPr>
+            <a:r>
+              <a:rPr sz="1800" b="0">
+                <a:solidFill>
+                  <a:srgbClr val="3D3D3D"/>
+                </a:solidFill>
+                <a:latin typeface="Pretendard"/>
+                <a:ea typeface="Pretendard"/>
+                <a:cs typeface="Pretendard"/>
+              </a:rPr>
               <a:t>docker compose exec -d spark-master …</a:t>
             </a:r>
           </a:p>
@@ -8883,7 +9171,7 @@
       </p:sp>
       <p:sp>
         <p:nvSpPr>
-          <p:cNvPr id="32" name="TextBox 31"/>
+          <p:cNvPr id="40" name="TextBox 39"/>
           <p:cNvSpPr txBox="1"/>
           <p:nvPr/>
         </p:nvSpPr>
@@ -8917,14 +9205,14 @@
                 <a:ea typeface="Pretendard"/>
                 <a:cs typeface="Pretendard"/>
               </a:rPr>
-              <a:t>앞에 docker compose exec spark-master /opt/spark/bin/spark-submit 을 붙인다 — 마스터 컨테이너 안의 spark-submit</a:t>
-            </a:r>
-          </a:p>
-        </p:txBody>
-      </p:sp>
-      <p:sp>
-        <p:nvSpPr>
-          <p:cNvPr id="33" name="Rectangle 32"/>
+              <a:t>제출 앞머리는 docker compose exec spark-master /opt/spark/bin/spark-submit</a:t>
+            </a:r>
+          </a:p>
+        </p:txBody>
+      </p:sp>
+      <p:sp>
+        <p:nvSpPr>
+          <p:cNvPr id="41" name="Rectangle 40"/>
           <p:cNvSpPr/>
           <p:nvPr/>
         </p:nvSpPr>
@@ -8954,7 +9242,7 @@
       </p:sp>
       <p:sp>
         <p:nvSpPr>
-          <p:cNvPr id="34" name="TextBox 33"/>
+          <p:cNvPr id="42" name="TextBox 41"/>
           <p:cNvSpPr txBox="1"/>
           <p:nvPr/>
         </p:nvSpPr>
@@ -8995,7 +9283,7 @@
       </p:sp>
       <p:sp>
         <p:nvSpPr>
-          <p:cNvPr id="35" name="TextBox 34"/>
+          <p:cNvPr id="43" name="TextBox 42"/>
           <p:cNvSpPr txBox="1"/>
           <p:nvPr/>
         </p:nvSpPr>
@@ -9054,7 +9342,7 @@
       <p:grpSpPr/>
       <p:sp>
         <p:nvSpPr>
-          <p:cNvPr id="2" name="Oval 1"/>
+          <p:cNvPr id="2" name="deckgen:decor"/>
           <p:cNvSpPr/>
           <p:nvPr/>
         </p:nvSpPr>
@@ -9084,7 +9372,7 @@
       </p:sp>
       <p:sp>
         <p:nvSpPr>
-          <p:cNvPr id="3" name="Oval 2"/>
+          <p:cNvPr id="3" name="deckgen:decor"/>
           <p:cNvSpPr/>
           <p:nvPr/>
         </p:nvSpPr>
@@ -9114,7 +9402,7 @@
       </p:sp>
       <p:sp>
         <p:nvSpPr>
-          <p:cNvPr id="4" name="Oval 3"/>
+          <p:cNvPr id="4" name="deckgen:decor"/>
           <p:cNvSpPr/>
           <p:nvPr/>
         </p:nvSpPr>
@@ -9219,7 +9507,7 @@
                 <a:ea typeface="Pretendard"/>
                 <a:cs typeface="Pretendard"/>
               </a:rPr>
-              <a:t>제출하고 로그를 읽는다 — 세 가지 증거</a:t>
+              <a:t>제출하고 로그를 읽는다 — 네 가지 증거</a:t>
             </a:r>
           </a:p>
         </p:txBody>
@@ -9263,7 +9551,7 @@
         <p:spPr>
           <a:xfrm>
             <a:off x="1143000" y="2933700"/>
-            <a:ext cx="11430000" cy="1095375"/>
+            <a:ext cx="16002000" cy="1095375"/>
           </a:xfrm>
           <a:prstGeom prst="roundRect">
             <a:avLst>
@@ -9368,7 +9656,7 @@
         <p:spPr>
           <a:xfrm>
             <a:off x="2324100" y="3143250"/>
-            <a:ext cx="9906000" cy="400050"/>
+            <a:ext cx="14478000" cy="400050"/>
           </a:xfrm>
           <a:prstGeom prst="rect">
             <a:avLst/>
@@ -9409,7 +9697,7 @@
         <p:spPr>
           <a:xfrm>
             <a:off x="2324100" y="3543300"/>
-            <a:ext cx="9906000" cy="361950"/>
+            <a:ext cx="14478000" cy="361950"/>
           </a:xfrm>
           <a:prstGeom prst="rect">
             <a:avLst/>
@@ -9436,7 +9724,7 @@
                 <a:ea typeface="Pretendard"/>
                 <a:cs typeface="Pretendard"/>
               </a:rPr>
-              <a:t>실행 중 8080 은 Running, 끝나면 Completed Applications 에 남는다</a:t>
+              <a:t>뒷자리는 매번 다름(실측 3.141400 · 3.142680) · UI 에 PythonPi Cores 4 · FINISHED</a:t>
             </a:r>
           </a:p>
         </p:txBody>
@@ -9450,7 +9738,7 @@
         <p:spPr>
           <a:xfrm>
             <a:off x="1143000" y="4200525"/>
-            <a:ext cx="11430000" cy="1095375"/>
+            <a:ext cx="16002000" cy="1095375"/>
           </a:xfrm>
           <a:prstGeom prst="roundRect">
             <a:avLst>
@@ -9555,7 +9843,7 @@
         <p:spPr>
           <a:xfrm>
             <a:off x="2324100" y="4410075"/>
-            <a:ext cx="9906000" cy="400050"/>
+            <a:ext cx="14478000" cy="400050"/>
           </a:xfrm>
           <a:prstGeom prst="rect">
             <a:avLst/>
@@ -9596,7 +9884,7 @@
         <p:spPr>
           <a:xfrm>
             <a:off x="2324100" y="4810125"/>
-            <a:ext cx="9906000" cy="361950"/>
+            <a:ext cx="14478000" cy="361950"/>
           </a:xfrm>
           <a:prstGeom prst="rect">
             <a:avLst/>
@@ -9637,7 +9925,7 @@
         <p:spPr>
           <a:xfrm>
             <a:off x="1143000" y="5467350"/>
-            <a:ext cx="11430000" cy="1095375"/>
+            <a:ext cx="16002000" cy="1095375"/>
           </a:xfrm>
           <a:prstGeom prst="roundRect">
             <a:avLst>
@@ -9742,7 +10030,7 @@
         <p:spPr>
           <a:xfrm>
             <a:off x="2324100" y="5676900"/>
-            <a:ext cx="9906000" cy="400050"/>
+            <a:ext cx="14478000" cy="400050"/>
           </a:xfrm>
           <a:prstGeom prst="rect">
             <a:avLst/>
@@ -9783,7 +10071,7 @@
         <p:spPr>
           <a:xfrm>
             <a:off x="2324100" y="6076950"/>
-            <a:ext cx="9906000" cy="361950"/>
+            <a:ext cx="14478000" cy="361950"/>
           </a:xfrm>
           <a:prstGeom prst="rect">
             <a:avLst/>
@@ -9823,20 +10111,20 @@
         </p:nvSpPr>
         <p:spPr>
           <a:xfrm>
-            <a:off x="13144500" y="2933700"/>
-            <a:ext cx="4000500" cy="3629025"/>
+            <a:off x="1143000" y="6734175"/>
+            <a:ext cx="16002000" cy="1095375"/>
           </a:xfrm>
           <a:prstGeom prst="roundRect">
             <a:avLst>
-              <a:gd name="adj" fmla="val 1312"/>
+              <a:gd name="adj" fmla="val 4347"/>
             </a:avLst>
           </a:prstGeom>
           <a:solidFill>
-            <a:srgbClr val="EDF3FD"/>
+            <a:srgbClr val="FAFBFD"/>
           </a:solidFill>
           <a:ln w="9525">
             <a:solidFill>
-              <a:srgbClr val="BFD3F5"/>
+              <a:srgbClr val="DCE1E8"/>
             </a:solidFill>
           </a:ln>
           <a:effectLst/>
@@ -9851,14 +10139,44 @@
       </p:sp>
       <p:sp>
         <p:nvSpPr>
-          <p:cNvPr id="24" name="TextBox 23"/>
-          <p:cNvSpPr txBox="1"/>
-          <p:nvPr/>
-        </p:nvSpPr>
-        <p:spPr>
-          <a:xfrm>
-            <a:off x="13487400" y="3929062"/>
-            <a:ext cx="3314700" cy="304800"/>
+          <p:cNvPr id="24" name="Oval 23"/>
+          <p:cNvSpPr/>
+          <p:nvPr/>
+        </p:nvSpPr>
+        <p:spPr>
+          <a:xfrm>
+            <a:off x="1447800" y="6981825"/>
+            <a:ext cx="590550" cy="590550"/>
+          </a:xfrm>
+          <a:prstGeom prst="ellipse">
+            <a:avLst/>
+          </a:prstGeom>
+          <a:solidFill>
+            <a:srgbClr val="0D2B5E"/>
+          </a:solidFill>
+          <a:ln>
+            <a:noFill/>
+          </a:ln>
+          <a:effectLst/>
+        </p:spPr>
+        <p:txBody>
+          <a:bodyPr rtlCol="0" anchor="ctr" wrap="square"/>
+          <a:lstStyle/>
+          <a:p>
+            <a:pPr algn="ctr"/>
+          </a:p>
+        </p:txBody>
+      </p:sp>
+      <p:sp>
+        <p:nvSpPr>
+          <p:cNvPr id="25" name="TextBox 24"/>
+          <p:cNvSpPr txBox="1"/>
+          <p:nvPr/>
+        </p:nvSpPr>
+        <p:spPr>
+          <a:xfrm>
+            <a:off x="1447800" y="7134225"/>
+            <a:ext cx="590550" cy="323850"/>
           </a:xfrm>
           <a:prstGeom prst="rect">
             <a:avLst/>
@@ -9871,35 +10189,76 @@
           </a:bodyPr>
           <a:lstStyle/>
           <a:p>
+            <a:pPr algn="ctr">
+              <a:lnSpc>
+                <a:spcPct val="100000"/>
+              </a:lnSpc>
+            </a:pPr>
+            <a:r>
+              <a:rPr sz="2250" b="1">
+                <a:solidFill>
+                  <a:srgbClr val="FFFFFF"/>
+                </a:solidFill>
+                <a:latin typeface="Pretendard"/>
+                <a:ea typeface="Pretendard"/>
+                <a:cs typeface="Pretendard"/>
+              </a:rPr>
+              <a:t>4</a:t>
+            </a:r>
+          </a:p>
+        </p:txBody>
+      </p:sp>
+      <p:sp>
+        <p:nvSpPr>
+          <p:cNvPr id="26" name="TextBox 25"/>
+          <p:cNvSpPr txBox="1"/>
+          <p:nvPr/>
+        </p:nvSpPr>
+        <p:spPr>
+          <a:xfrm>
+            <a:off x="2324100" y="6943725"/>
+            <a:ext cx="14478000" cy="400050"/>
+          </a:xfrm>
+          <a:prstGeom prst="rect">
+            <a:avLst/>
+          </a:prstGeom>
+          <a:noFill/>
+        </p:spPr>
+        <p:txBody>
+          <a:bodyPr wrap="square" lIns="0" rIns="0" tIns="0" bIns="0" anchor="t">
+            <a:spAutoFit/>
+          </a:bodyPr>
+          <a:lstStyle/>
+          <a:p>
             <a:pPr algn="l">
               <a:lnSpc>
-                <a:spcPct val="100000"/>
-              </a:lnSpc>
-            </a:pPr>
-            <a:r>
-              <a:rPr sz="1800" b="1" spc="190">
-                <a:solidFill>
-                  <a:srgbClr val="1E5BC6"/>
-                </a:solidFill>
-                <a:latin typeface="Pretendard"/>
-                <a:ea typeface="Pretendard"/>
-                <a:cs typeface="Pretendard"/>
-              </a:rPr>
-              <a:t>실행 중 UI 에서 이름을 누르면</a:t>
-            </a:r>
-          </a:p>
-        </p:txBody>
-      </p:sp>
-      <p:sp>
-        <p:nvSpPr>
-          <p:cNvPr id="25" name="TextBox 24"/>
-          <p:cNvSpPr txBox="1"/>
-          <p:nvPr/>
-        </p:nvSpPr>
-        <p:spPr>
-          <a:xfrm>
-            <a:off x="13487400" y="4329112"/>
-            <a:ext cx="3314700" cy="1238250"/>
+                <a:spcPct val="110000"/>
+              </a:lnSpc>
+            </a:pPr>
+            <a:r>
+              <a:rPr sz="2475" b="1">
+                <a:solidFill>
+                  <a:srgbClr val="0D2B5E"/>
+                </a:solidFill>
+                <a:latin typeface="Pretendard"/>
+                <a:ea typeface="Pretendard"/>
+                <a:cs typeface="Pretendard"/>
+              </a:rPr>
+              <a:t>executors: 3</a:t>
+            </a:r>
+          </a:p>
+        </p:txBody>
+      </p:sp>
+      <p:sp>
+        <p:nvSpPr>
+          <p:cNvPr id="27" name="TextBox 26"/>
+          <p:cNvSpPr txBox="1"/>
+          <p:nvPr/>
+        </p:nvSpPr>
+        <p:spPr>
+          <a:xfrm>
+            <a:off x="2324100" y="7343775"/>
+            <a:ext cx="14478000" cy="361950"/>
           </a:xfrm>
           <a:prstGeom prst="rect">
             <a:avLst/>
@@ -9914,44 +10273,26 @@
           <a:p>
             <a:pPr algn="l">
               <a:lnSpc>
-                <a:spcPct val="138000"/>
-              </a:lnSpc>
-            </a:pPr>
-            <a:r>
-              <a:rPr sz="2700" b="1">
-                <a:solidFill>
-                  <a:srgbClr val="0D2B5E"/>
-                </a:solidFill>
-                <a:latin typeface="Pretendard"/>
-                <a:ea typeface="Pretendard"/>
-                <a:cs typeface="Pretendard"/>
-              </a:rPr>
-              <a:t>4040 화면</a:t>
-            </a:r>
-          </a:p>
-          <a:p>
-            <a:pPr algn="l">
-              <a:lnSpc>
-                <a:spcPct val="138000"/>
-              </a:lnSpc>
-            </a:pPr>
-            <a:r>
-              <a:rPr sz="2700" b="1">
-                <a:solidFill>
-                  <a:srgbClr val="0D2B5E"/>
-                </a:solidFill>
-                <a:latin typeface="Pretendard"/>
-                <a:ea typeface="Pretendard"/>
-                <a:cs typeface="Pretendard"/>
-              </a:rPr>
-              <a:t>Jobs·Stages</a:t>
-            </a:r>
-          </a:p>
-        </p:txBody>
-      </p:sp>
-      <p:sp>
-        <p:nvSpPr>
-          <p:cNvPr id="26" name="Rectangle 25"/>
+                <a:spcPct val="120000"/>
+              </a:lnSpc>
+            </a:pPr>
+            <a:r>
+              <a:rPr sz="2025" b="0">
+                <a:solidFill>
+                  <a:srgbClr val="3D3D3D"/>
+                </a:solidFill>
+                <a:latin typeface="Pretendard"/>
+                <a:ea typeface="Pretendard"/>
+                <a:cs typeface="Pretendard"/>
+              </a:rPr>
+              <a:t>워커마다 익스큐터 하나씩 2개 + 드라이버 1개(이 함수는 드라이버도 센다)</a:t>
+            </a:r>
+          </a:p>
+        </p:txBody>
+      </p:sp>
+      <p:sp>
+        <p:nvSpPr>
+          <p:cNvPr id="28" name="Rectangle 27"/>
           <p:cNvSpPr/>
           <p:nvPr/>
         </p:nvSpPr>
@@ -9981,7 +10322,7 @@
       </p:sp>
       <p:sp>
         <p:nvSpPr>
-          <p:cNvPr id="27" name="TextBox 26"/>
+          <p:cNvPr id="29" name="TextBox 28"/>
           <p:cNvSpPr txBox="1"/>
           <p:nvPr/>
         </p:nvSpPr>
@@ -10022,7 +10363,7 @@
       </p:sp>
       <p:sp>
         <p:nvSpPr>
-          <p:cNvPr id="28" name="TextBox 27"/>
+          <p:cNvPr id="30" name="TextBox 29"/>
           <p:cNvSpPr txBox="1"/>
           <p:nvPr/>
         </p:nvSpPr>
@@ -10081,7 +10422,7 @@
       <p:grpSpPr/>
       <p:sp>
         <p:nvSpPr>
-          <p:cNvPr id="2" name="Oval 1"/>
+          <p:cNvPr id="2" name="deckgen:decor"/>
           <p:cNvSpPr/>
           <p:nvPr/>
         </p:nvSpPr>
@@ -10111,7 +10452,7 @@
       </p:sp>
       <p:sp>
         <p:nvSpPr>
-          <p:cNvPr id="3" name="Oval 2"/>
+          <p:cNvPr id="3" name="deckgen:decor"/>
           <p:cNvSpPr/>
           <p:nvPr/>
         </p:nvSpPr>
@@ -10141,7 +10482,7 @@
       </p:sp>
       <p:sp>
         <p:nvSpPr>
-          <p:cNvPr id="4" name="Oval 3"/>
+          <p:cNvPr id="4" name="deckgen:decor"/>
           <p:cNvSpPr/>
           <p:nvPr/>
         </p:nvSpPr>
@@ -10317,7 +10658,7 @@
                 <a:ea typeface="Pretendard"/>
                 <a:cs typeface="Pretendard"/>
               </a:rPr>
-              <a:t>제한 없음 — 기본값</a:t>
+              <a:t>제한 없음 — 2단계 제출</a:t>
             </a:r>
           </a:p>
         </p:txBody>
@@ -10358,7 +10699,7 @@
                 <a:ea typeface="Pretendard"/>
                 <a:cs typeface="Pretendard"/>
               </a:rPr>
-              <a:t>워커의 자원을 최대한 쓴다</a:t>
+              <a:t>워커 둘의 코어를 모두 쓴다</a:t>
             </a:r>
           </a:p>
         </p:txBody>
@@ -10463,7 +10804,7 @@
                 <a:ea typeface="Pretendard"/>
                 <a:cs typeface="Pretendard"/>
               </a:rPr>
-              <a:t>옵션 없이 /tmp/first_job.py 제출</a:t>
+              <a:t>Completed 의 first-cluster-job</a:t>
             </a:r>
           </a:p>
         </p:txBody>
@@ -10534,7 +10875,7 @@
                 <a:ea typeface="Pretendard"/>
                 <a:cs typeface="Pretendard"/>
               </a:rPr>
-              <a:t>UI 의 Cores 열에 많이 잡힌다</a:t>
+              <a:t>Cores 4</a:t>
             </a:r>
           </a:p>
         </p:txBody>
@@ -10605,7 +10946,7 @@
                 <a:ea typeface="Pretendard"/>
                 <a:cs typeface="Pretendard"/>
               </a:rPr>
-              <a:t>다른 잡은 기다려야 한다</a:t>
+              <a:t>Duration 실측 14초</a:t>
             </a:r>
           </a:p>
         </p:txBody>
@@ -10687,7 +11028,7 @@
                 <a:ea typeface="Pretendard"/>
                 <a:cs typeface="Pretendard"/>
               </a:rPr>
-              <a:t>--executor-memory 1g 와 함께 제한한다</a:t>
+              <a:t>--executor-memory 1g 와 함께 제한</a:t>
             </a:r>
           </a:p>
         </p:txBody>
@@ -10792,7 +11133,7 @@
                 <a:ea typeface="Pretendard"/>
                 <a:cs typeface="Pretendard"/>
               </a:rPr>
-              <a:t>Completed Applications 의 Cores 가 적다</a:t>
+              <a:t>같은 결과 세 줄</a:t>
             </a:r>
           </a:p>
         </p:txBody>
@@ -10863,7 +11204,7 @@
                 <a:ea typeface="Pretendard"/>
                 <a:cs typeface="Pretendard"/>
               </a:rPr>
-              <a:t>여러 잡을 동시에 돌릴 때 나눠 쓴다</a:t>
+              <a:t>Cores 2</a:t>
             </a:r>
           </a:p>
         </p:txBody>
@@ -10934,7 +11275,7 @@
                 <a:ea typeface="Pretendard"/>
                 <a:cs typeface="Pretendard"/>
               </a:rPr>
-              <a:t>5단계 동시 제출의 열쇠</a:t>
+              <a:t>Duration 실측 17초 — 비슷하다</a:t>
             </a:r>
           </a:p>
         </p:txBody>
@@ -11142,7 +11483,7 @@
       <p:grpSpPr/>
       <p:sp>
         <p:nvSpPr>
-          <p:cNvPr id="2" name="Oval 1"/>
+          <p:cNvPr id="2" name="deckgen:decor"/>
           <p:cNvSpPr/>
           <p:nvPr/>
         </p:nvSpPr>
@@ -11172,7 +11513,7 @@
       </p:sp>
       <p:sp>
         <p:nvSpPr>
-          <p:cNvPr id="3" name="Oval 2"/>
+          <p:cNvPr id="3" name="deckgen:decor"/>
           <p:cNvSpPr/>
           <p:nvPr/>
         </p:nvSpPr>
@@ -11202,7 +11543,7 @@
       </p:sp>
       <p:sp>
         <p:nvSpPr>
-          <p:cNvPr id="4" name="Oval 3"/>
+          <p:cNvPr id="4" name="deckgen:decor"/>
           <p:cNvSpPr/>
           <p:nvPr/>
         </p:nvSpPr>
@@ -11307,7 +11648,7 @@
                 <a:ea typeface="Pretendard"/>
                 <a:cs typeface="Pretendard"/>
               </a:rPr>
-              <a:t>워커보다 큰 메모리를 요구한다</a:t>
+              <a:t>워커(2g)보다 큰 메모리를 요구한다</a:t>
             </a:r>
           </a:p>
         </p:txBody>
@@ -11378,7 +11719,7 @@
                 <a:ea typeface="Pretendard"/>
                 <a:cs typeface="Pretendard"/>
               </a:rPr>
-              <a:t>이론의 「자원이 모자라면 대기 상태로 멈춘다」를 직접 봅니다 — 40초 뒤 timeout 으로 끝납니다</a:t>
+              <a:t>이론의 「자원이 모자라면 대기 상태로 멈춘다」를 직접 봅니다</a:t>
             </a:r>
           </a:p>
         </p:txBody>
@@ -11483,7 +11824,7 @@
                 <a:ea typeface="Pretendard"/>
                 <a:cs typeface="Pretendard"/>
               </a:rPr>
-              <a:t>timeout 40</a:t>
+              <a:t>memory 8g 요구</a:t>
             </a:r>
           </a:p>
         </p:txBody>
@@ -11524,7 +11865,7 @@
                 <a:ea typeface="Pretendard"/>
                 <a:cs typeface="Pretendard"/>
               </a:rPr>
-              <a:t>40초 뒤</a:t>
+              <a:t>워커는 2g</a:t>
             </a:r>
           </a:p>
           <a:p>
@@ -11542,7 +11883,7 @@
                 <a:ea typeface="Pretendard"/>
                 <a:cs typeface="Pretendard"/>
               </a:rPr>
-              <a:t>자동 종료</a:t>
+              <a:t>배치 불가</a:t>
             </a:r>
           </a:p>
         </p:txBody>
@@ -11647,7 +11988,7 @@
                 <a:ea typeface="Pretendard"/>
                 <a:cs typeface="Pretendard"/>
               </a:rPr>
-              <a:t>memory 8g 요구</a:t>
+              <a:t>WARN 경고</a:t>
             </a:r>
           </a:p>
         </p:txBody>
@@ -11688,7 +12029,7 @@
                 <a:ea typeface="Pretendard"/>
                 <a:cs typeface="Pretendard"/>
               </a:rPr>
-              <a:t>워커는 2g</a:t>
+              <a:t>15초 간격</a:t>
             </a:r>
           </a:p>
           <a:p>
@@ -11706,7 +12047,7 @@
                 <a:ea typeface="Pretendard"/>
                 <a:cs typeface="Pretendard"/>
               </a:rPr>
-              <a:t>배치 불가</a:t>
+              <a:t>두 줄</a:t>
             </a:r>
           </a:p>
         </p:txBody>
@@ -11811,7 +12152,7 @@
                 <a:ea typeface="Pretendard"/>
                 <a:cs typeface="Pretendard"/>
               </a:rPr>
-              <a:t>grep 경고</a:t>
+              <a:t>마스터 UI</a:t>
             </a:r>
           </a:p>
         </p:txBody>
@@ -11852,7 +12193,7 @@
                 <a:ea typeface="Pretendard"/>
                 <a:cs typeface="Pretendard"/>
               </a:rPr>
-              <a:t>not accepted</a:t>
+              <a:t>WAITING</a:t>
             </a:r>
           </a:p>
           <a:p>
@@ -11870,7 +12211,7 @@
                 <a:ea typeface="Pretendard"/>
                 <a:cs typeface="Pretendard"/>
               </a:rPr>
-              <a:t>any resources</a:t>
+              <a:t>Cores 0 · 8.0 GiB</a:t>
             </a:r>
           </a:p>
         </p:txBody>
@@ -11975,7 +12316,7 @@
                 <a:ea typeface="Pretendard"/>
                 <a:cs typeface="Pretendard"/>
               </a:rPr>
-              <a:t>마스터 UI</a:t>
+              <a:t>timeout 40</a:t>
             </a:r>
           </a:p>
         </p:txBody>
@@ -12016,7 +12357,7 @@
                 <a:ea typeface="Pretendard"/>
                 <a:cs typeface="Pretendard"/>
               </a:rPr>
-              <a:t>WAITING</a:t>
+              <a:t>40초 뒤</a:t>
             </a:r>
           </a:p>
           <a:p>
@@ -12034,7 +12375,7 @@
                 <a:ea typeface="Pretendard"/>
                 <a:cs typeface="Pretendard"/>
               </a:rPr>
-              <a:t>상태로 남음</a:t>
+              <a:t>프롬프트로</a:t>
             </a:r>
           </a:p>
         </p:txBody>
@@ -12139,7 +12480,7 @@
                 <a:ea typeface="Pretendard"/>
                 <a:cs typeface="Pretendard"/>
               </a:rPr>
-              <a:t>낮춰 재제출</a:t>
+              <a:t>Completed</a:t>
             </a:r>
           </a:p>
         </p:txBody>
@@ -12180,7 +12521,7 @@
                 <a:ea typeface="Pretendard"/>
                 <a:cs typeface="Pretendard"/>
               </a:rPr>
-              <a:t>--executor-memory</a:t>
+              <a:t>Cores 0 으로</a:t>
             </a:r>
           </a:p>
           <a:p>
@@ -12198,7 +12539,7 @@
                 <a:ea typeface="Pretendard"/>
                 <a:cs typeface="Pretendard"/>
               </a:rPr>
-              <a:t>2g 이하</a:t>
+              <a:t>옮겨 감</a:t>
             </a:r>
           </a:p>
         </p:txBody>
@@ -12335,7 +12676,7 @@
       <p:grpSpPr/>
       <p:sp>
         <p:nvSpPr>
-          <p:cNvPr id="2" name="Oval 1"/>
+          <p:cNvPr id="2" name="deckgen:decor"/>
           <p:cNvSpPr/>
           <p:nvPr/>
         </p:nvSpPr>
@@ -12365,7 +12706,7 @@
       </p:sp>
       <p:sp>
         <p:nvSpPr>
-          <p:cNvPr id="3" name="Oval 2"/>
+          <p:cNvPr id="3" name="deckgen:decor"/>
           <p:cNvSpPr/>
           <p:nvPr/>
         </p:nvSpPr>
@@ -12395,7 +12736,7 @@
       </p:sp>
       <p:sp>
         <p:nvSpPr>
-          <p:cNvPr id="4" name="Oval 3"/>
+          <p:cNvPr id="4" name="deckgen:decor"/>
           <p:cNvSpPr/>
           <p:nvPr/>
         </p:nvSpPr>
@@ -12676,7 +13017,7 @@
                 <a:ea typeface="Pretendard"/>
                 <a:cs typeface="Pretendard"/>
               </a:rPr>
-              <a:t>① 마스터 UI 에서 워커가 살아 있는지</a:t>
+              <a:t>마스터 UI 에서 워커가 살아 있는지</a:t>
             </a:r>
           </a:p>
         </p:txBody>
@@ -12863,7 +13204,7 @@
                 <a:ea typeface="Pretendard"/>
                 <a:cs typeface="Pretendard"/>
               </a:rPr>
-              <a:t>② 남은 코어·메모리가 요청보다 큰지</a:t>
+              <a:t>남은 코어·메모리가 요청보다 큰지</a:t>
             </a:r>
           </a:p>
         </p:txBody>
@@ -13050,7 +13391,7 @@
                 <a:ea typeface="Pretendard"/>
                 <a:cs typeface="Pretendard"/>
               </a:rPr>
-              <a:t>③ 다른 잡이 자원을 다 쓰고 있지는 않은지</a:t>
+              <a:t>다른 잡이 자원을 다 쓰고 있지는 않은지</a:t>
             </a:r>
           </a:p>
         </p:txBody>
@@ -13362,7 +13703,7 @@
       <p:grpSpPr/>
       <p:sp>
         <p:nvSpPr>
-          <p:cNvPr id="2" name="Oval 1"/>
+          <p:cNvPr id="2" name="deckgen:decor"/>
           <p:cNvSpPr/>
           <p:nvPr/>
         </p:nvSpPr>
@@ -13392,7 +13733,7 @@
       </p:sp>
       <p:sp>
         <p:nvSpPr>
-          <p:cNvPr id="3" name="Oval 2"/>
+          <p:cNvPr id="3" name="deckgen:decor"/>
           <p:cNvSpPr/>
           <p:nvPr/>
         </p:nvSpPr>
@@ -13422,7 +13763,7 @@
       </p:sp>
       <p:sp>
         <p:nvSpPr>
-          <p:cNvPr id="4" name="Oval 3"/>
+          <p:cNvPr id="4" name="deckgen:decor"/>
           <p:cNvSpPr/>
           <p:nvPr/>
         </p:nvSpPr>
@@ -13639,7 +13980,7 @@
                 <a:ea typeface="Pretendard"/>
                 <a:cs typeface="Pretendard"/>
               </a:rPr>
-              <a:t>두 애플리케이션이 동시에 RUNNING</a:t>
+              <a:t>각 10초 안팎 · 둘 다 Cores 2</a:t>
             </a:r>
           </a:p>
         </p:txBody>
@@ -14212,7 +14553,7 @@
                 <a:ea typeface="Pretendard"/>
                 <a:cs typeface="Pretendard"/>
               </a:rPr>
-              <a:t>옵션 없이 제출했다면</a:t>
+              <a:t>옵션을 빼고 제출하면</a:t>
             </a:r>
           </a:p>
         </p:txBody>
@@ -14253,7 +14594,7 @@
                 <a:ea typeface="Pretendard"/>
                 <a:cs typeface="Pretendard"/>
               </a:rPr>
-              <a:t>첫 잡이 전부 차지해 둘째는 기다린다</a:t>
+              <a:t>첫 잡이 Cores 4 로 전부 차지한다</a:t>
             </a:r>
           </a:p>
         </p:txBody>
@@ -14433,7 +14774,7 @@
                 <a:ea typeface="Pretendard"/>
                 <a:cs typeface="Pretendard"/>
               </a:rPr>
-              <a:t>코어 전부</a:t>
+              <a:t>Cores 4</a:t>
             </a:r>
           </a:p>
         </p:txBody>
@@ -14609,7 +14950,7 @@
                 <a:ea typeface="Pretendard"/>
                 <a:cs typeface="Pretendard"/>
               </a:rPr>
-              <a:t>기다림</a:t>
+              <a:t>WAITING</a:t>
             </a:r>
           </a:p>
         </p:txBody>
@@ -14785,7 +15126,7 @@
                 <a:ea typeface="Pretendard"/>
                 <a:cs typeface="Pretendard"/>
               </a:rPr>
-              <a:t>둘째 시작</a:t>
+              <a:t>둘째 RUNNING</a:t>
             </a:r>
           </a:p>
         </p:txBody>

--- a/data-eng/decks/w5d2s3.pptx
+++ b/data-eng/decks/w5d2s3.pptx
@@ -6487,7 +6487,7 @@
                 <a:ea typeface="Pretendard"/>
                 <a:cs typeface="Pretendard"/>
               </a:rPr>
-              <a:t>실행 중 마스터 UI 의 애플리케이션 이름을 누르면 5-1 의 Jobs·Stages 화면이 열립니다</a:t>
+              <a:t>앱 이름 링크는 컨테이너 안 주소라 안 열린다 — Jobs·Stages(4040)는 5-5 에서</a:t>
             </a:r>
           </a:p>
         </p:txBody>
